--- a/slides/datasets-in-10-minutes-facts-grounding.pptx
+++ b/slides/datasets-in-10-minutes-facts-grounding.pptx
@@ -7449,7 +7449,7 @@
         </p:nvSpPr>
         <p:spPr>
           <a:xfrm>
-            <a:off x="594360" y="1389888"/>
+            <a:off x="594360" y="1591503"/>
             <a:ext cx="7955279" cy="210312"/>
           </a:xfrm>
           <a:prstGeom prst="rect">
@@ -7503,7 +7503,7 @@
         </p:nvSpPr>
         <p:spPr>
           <a:xfrm>
-            <a:off x="594360" y="1682496"/>
+            <a:off x="594360" y="1901311"/>
             <a:ext cx="7955279" cy="914400"/>
           </a:xfrm>
           <a:prstGeom prst="rect">
@@ -7557,7 +7557,7 @@
         </p:nvSpPr>
         <p:spPr>
           <a:xfrm>
-            <a:off x="594360" y="2560320"/>
+            <a:off x="594360" y="2437663"/>
             <a:ext cx="7955279" cy="210312"/>
           </a:xfrm>
           <a:prstGeom prst="rect">
@@ -7611,7 +7611,7 @@
         </p:nvSpPr>
         <p:spPr>
           <a:xfrm>
-            <a:off x="594360" y="2807208"/>
+            <a:off x="594360" y="2770244"/>
             <a:ext cx="7955279" cy="658368"/>
           </a:xfrm>
           <a:prstGeom prst="rect">
@@ -7665,7 +7665,7 @@
         </p:nvSpPr>
         <p:spPr>
           <a:xfrm>
-            <a:off x="594360" y="3621024"/>
+            <a:off x="594360" y="3307014"/>
             <a:ext cx="7955279" cy="210312"/>
           </a:xfrm>
           <a:prstGeom prst="rect">
@@ -7719,7 +7719,7 @@
         </p:nvSpPr>
         <p:spPr>
           <a:xfrm>
-            <a:off x="594360" y="3831336"/>
+            <a:off x="594360" y="3639379"/>
             <a:ext cx="7955279" cy="685800"/>
           </a:xfrm>
           <a:prstGeom prst="rect">
@@ -7978,7 +7978,7 @@
         </p:nvSpPr>
         <p:spPr>
           <a:xfrm>
-            <a:off x="594360" y="1389888"/>
+            <a:off x="594360" y="1830342"/>
             <a:ext cx="7955279" cy="246888"/>
           </a:xfrm>
           <a:prstGeom prst="rect">
@@ -8032,7 +8032,7 @@
         </p:nvSpPr>
         <p:spPr>
           <a:xfrm>
-            <a:off x="548640" y="1761256"/>
+            <a:off x="548640" y="2158759"/>
             <a:ext cx="8046720" cy="1948191"/>
           </a:xfrm>
           <a:prstGeom prst="rect">
@@ -8076,7 +8076,7 @@
         </p:nvSpPr>
         <p:spPr>
           <a:xfrm>
-            <a:off x="722376" y="1847088"/>
+            <a:off x="722376" y="2244590"/>
             <a:ext cx="7699248" cy="2157984"/>
           </a:xfrm>
           <a:prstGeom prst="rect">
@@ -8335,7 +8335,7 @@
         </p:nvSpPr>
         <p:spPr>
           <a:xfrm>
-            <a:off x="594360" y="1389888"/>
+            <a:off x="594360" y="1416593"/>
             <a:ext cx="7955279" cy="210312"/>
           </a:xfrm>
           <a:prstGeom prst="rect">
@@ -8389,7 +8389,7 @@
         </p:nvSpPr>
         <p:spPr>
           <a:xfrm>
-            <a:off x="594360" y="1682496"/>
+            <a:off x="594360" y="1675602"/>
             <a:ext cx="7955279" cy="914400"/>
           </a:xfrm>
           <a:prstGeom prst="rect">
@@ -8443,7 +8443,7 @@
         </p:nvSpPr>
         <p:spPr>
           <a:xfrm>
-            <a:off x="594360" y="2560320"/>
+            <a:off x="594360" y="2464327"/>
             <a:ext cx="7955279" cy="210312"/>
           </a:xfrm>
           <a:prstGeom prst="rect">
@@ -8497,7 +8497,7 @@
         </p:nvSpPr>
         <p:spPr>
           <a:xfrm>
-            <a:off x="594360" y="2807208"/>
+            <a:off x="594360" y="2746108"/>
             <a:ext cx="7955279" cy="658368"/>
           </a:xfrm>
           <a:prstGeom prst="rect">
@@ -8551,7 +8551,7 @@
         </p:nvSpPr>
         <p:spPr>
           <a:xfrm>
-            <a:off x="594360" y="3621024"/>
+            <a:off x="594360" y="3533995"/>
             <a:ext cx="7955279" cy="210312"/>
           </a:xfrm>
           <a:prstGeom prst="rect">
@@ -8605,7 +8605,7 @@
         </p:nvSpPr>
         <p:spPr>
           <a:xfrm>
-            <a:off x="594360" y="3831336"/>
+            <a:off x="594360" y="3815560"/>
             <a:ext cx="7955279" cy="685800"/>
           </a:xfrm>
           <a:prstGeom prst="rect">
@@ -12189,7 +12189,7 @@
                 <a:ea typeface="Noto Sans CJK JP"/>
                 <a:cs typeface="Noto Sans"/>
               </a:rPr>
-              <a:t>FACTS Groundingの公式配布ページ</a:t>
+              <a:t>FACTS Groundingの公式サイト</a:t>
             </a:r>
           </a:p>
         </p:txBody>
@@ -12237,21 +12237,74 @@
                 <a:ea typeface="Noto Sans CJK JP"/>
                 <a:cs typeface="Noto Sans"/>
               </a:rPr>
-              <a:t>FACTS Grounding: 配布ページ</a:t>
+              <a:t>FACTS Grounding: 公式サイト</a:t>
+            </a:r>
+          </a:p>
+        </p:txBody>
+      </p:sp>
+      <p:sp>
+        <p:nvSpPr>
+          <p:cNvPr id="5" name="TextBox 4"/>
+          <p:cNvSpPr txBox="1"/>
+          <p:nvPr/>
+        </p:nvSpPr>
+        <p:spPr>
+          <a:xfrm>
+            <a:off x="502920" y="4690872"/>
+            <a:ext cx="8183879" cy="393192"/>
+          </a:xfrm>
+          <a:prstGeom prst="rect">
+            <a:avLst/>
+          </a:prstGeom>
+          <a:noFill/>
+        </p:spPr>
+        <p:txBody>
+          <a:bodyPr wrap="square" lIns="0" rIns="0" tIns="0" bIns="0">
+            <a:noAutofit/>
+          </a:bodyPr>
+          <a:lstStyle/>
+          <a:p>
+            <a:pPr algn="l">
+              <a:lnSpc>
+                <a:spcPct val="110000"/>
+              </a:lnSpc>
+              <a:spcBef>
+                <a:spcPts val="0"/>
+              </a:spcBef>
+              <a:spcAft>
+                <a:spcPts val="0"/>
+              </a:spcAft>
+              <a:buNone/>
+              <a:defRPr sz="810" b="0">
+                <a:solidFill>
+                  <a:srgbClr val="303437"/>
+                </a:solidFill>
+                <a:latin typeface="Noto Sans"/>
+              </a:defRPr>
+            </a:pPr>
+            <a:r>
+              <a:rPr sz="1000">
+                <a:solidFill>
+                  <a:srgbClr val="626669"/>
+                </a:solidFill>
+                <a:latin typeface="Noto Sans"/>
+                <a:hlinkClick r:id="rId5"/>
+              </a:rPr>
+              <a:t>https://deepmind.google/blog/facts-grounding-a-new-benchmark-for-evaluating-the-factuality-of-large-language-models/</a:t>
             </a:r>
           </a:p>
         </p:txBody>
       </p:sp>
       <p:pic>
         <p:nvPicPr>
-          <p:cNvPr id="4" name="Picture 3" descr="hf-page.png"/>
+          <p:cNvPr id="6" name="公式サイトの画面" descr="image.png"/>
           <p:cNvPicPr>
             <a:picLocks noChangeAspect="1"/>
           </p:cNvPicPr>
           <p:nvPr/>
         </p:nvPicPr>
         <p:blipFill>
-          <a:blip r:embed="rId2"/>
+          <a:blip r:embed="rId4"/>
           <a:stretch>
             <a:fillRect/>
           </a:stretch>
@@ -12259,104 +12312,13 @@
         <p:spPr>
           <a:xfrm>
             <a:off x="2274570" y="1481328"/>
-            <a:ext cx="4594859" cy="3063240"/>
+            <a:ext cx="4594858" cy="3063239"/>
           </a:xfrm>
           <a:prstGeom prst="rect">
             <a:avLst/>
           </a:prstGeom>
         </p:spPr>
       </p:pic>
-      <p:sp>
-        <p:nvSpPr>
-          <p:cNvPr id="5" name="TextBox 4"/>
-          <p:cNvSpPr txBox="1"/>
-          <p:nvPr/>
-        </p:nvSpPr>
-        <p:spPr>
-          <a:xfrm>
-            <a:off x="502920" y="4690872"/>
-            <a:ext cx="8183879" cy="393192"/>
-          </a:xfrm>
-          <a:prstGeom prst="rect">
-            <a:avLst/>
-          </a:prstGeom>
-          <a:noFill/>
-        </p:spPr>
-        <p:txBody>
-          <a:bodyPr wrap="square" lIns="0" rIns="0" tIns="0" bIns="0">
-            <a:noAutofit/>
-          </a:bodyPr>
-          <a:lstStyle/>
-          <a:p>
-            <a:pPr algn="l">
-              <a:lnSpc>
-                <a:spcPct val="112000"/>
-              </a:lnSpc>
-              <a:spcBef>
-                <a:spcPts val="0"/>
-              </a:spcBef>
-              <a:spcAft>
-                <a:spcPts val="0"/>
-              </a:spcAft>
-              <a:buNone/>
-              <a:defRPr sz="810" b="0">
-                <a:solidFill>
-                  <a:srgbClr val="303437"/>
-                </a:solidFill>
-                <a:latin typeface="Noto Sans"/>
-              </a:defRPr>
-            </a:pPr>
-            <a:r>
-              <a:rPr sz="810" b="0" lang="ja-JP" altLang="en-US">
-                <a:solidFill>
-                  <a:srgbClr val="626669"/>
-                </a:solidFill>
-                <a:latin typeface="Noto Sans"/>
-                <a:ea typeface="Noto Sans CJK JP"/>
-                <a:cs typeface="Noto Sans"/>
-              </a:rPr>
-              <a:t/>
-            </a:r>
-            <a:r>
-              <a:rPr sz="810" b="0" lang="ja-JP" altLang="en-US">
-                <a:solidFill>
-                  <a:srgbClr val="626669"/>
-                </a:solidFill>
-                <a:latin typeface="Noto Sans"/>
-                <a:ea typeface="Noto Sans CJK JP"/>
-                <a:cs typeface="Noto Sans"/>
-              </a:rPr>
-              <a:t>Google (2024). FACTS Grounding 1.0 Public Examples. 860問 / CC BY 4.0。</a:t>
-            </a:r>
-          </a:p>
-          <a:p>
-            <a:pPr>
-              <a:lnSpc>
-                <a:spcPct val="112000"/>
-              </a:lnSpc>
-              <a:buNone/>
-              <a:defRPr sz="810" b="0">
-                <a:solidFill>
-                  <a:srgbClr val="303437"/>
-                </a:solidFill>
-                <a:latin typeface="Noto Sans"/>
-              </a:defRPr>
-            </a:pPr>
-            <a:r>
-              <a:rPr sz="810" b="0" lang="ja-JP" altLang="en-US">
-                <a:solidFill>
-                  <a:srgbClr val="626669"/>
-                </a:solidFill>
-                <a:latin typeface="Noto Sans"/>
-                <a:ea typeface="Noto Sans CJK JP"/>
-                <a:cs typeface="Noto Sans"/>
-                <a:hlinkClick r:id="rId3"/>
-              </a:rPr>
-              <a:t>https://huggingface.co/datasets/google/FACTS-grounding-public</a:t>
-            </a:r>
-          </a:p>
-        </p:txBody>
-      </p:sp>
     </p:spTree>
   </p:cSld>
   <p:clrMapOvr>
@@ -17402,7 +17364,7 @@
         </p:nvSpPr>
         <p:spPr>
           <a:xfrm>
-            <a:off x="594360" y="1389888"/>
+            <a:off x="594360" y="1684883"/>
             <a:ext cx="7955279" cy="246888"/>
           </a:xfrm>
           <a:prstGeom prst="rect">
@@ -17456,7 +17418,7 @@
         </p:nvSpPr>
         <p:spPr>
           <a:xfrm>
-            <a:off x="548640" y="1761256"/>
+            <a:off x="548640" y="2014061"/>
             <a:ext cx="8046720" cy="2238348"/>
           </a:xfrm>
           <a:prstGeom prst="rect">
@@ -17500,7 +17462,7 @@
         </p:nvSpPr>
         <p:spPr>
           <a:xfrm>
-            <a:off x="722376" y="1847088"/>
+            <a:off x="722376" y="2099893"/>
             <a:ext cx="7699248" cy="2157984"/>
           </a:xfrm>
           <a:prstGeom prst="rect">
@@ -17759,7 +17721,7 @@
         </p:nvSpPr>
         <p:spPr>
           <a:xfrm>
-            <a:off x="594360" y="1389888"/>
+            <a:off x="594360" y="1422136"/>
             <a:ext cx="7955279" cy="210312"/>
           </a:xfrm>
           <a:prstGeom prst="rect">
@@ -17813,7 +17775,7 @@
         </p:nvSpPr>
         <p:spPr>
           <a:xfrm>
-            <a:off x="594360" y="1682496"/>
+            <a:off x="594360" y="1731944"/>
             <a:ext cx="7955279" cy="914400"/>
           </a:xfrm>
           <a:prstGeom prst="rect">
@@ -17867,7 +17829,7 @@
         </p:nvSpPr>
         <p:spPr>
           <a:xfrm>
-            <a:off x="594360" y="2560320"/>
+            <a:off x="594360" y="2609570"/>
             <a:ext cx="7955279" cy="210312"/>
           </a:xfrm>
           <a:prstGeom prst="rect">
@@ -17921,7 +17883,7 @@
         </p:nvSpPr>
         <p:spPr>
           <a:xfrm>
-            <a:off x="594360" y="2807208"/>
+            <a:off x="594360" y="2942151"/>
             <a:ext cx="7955279" cy="658368"/>
           </a:xfrm>
           <a:prstGeom prst="rect">
@@ -17975,7 +17937,7 @@
         </p:nvSpPr>
         <p:spPr>
           <a:xfrm>
-            <a:off x="594360" y="3621024"/>
+            <a:off x="594360" y="3477651"/>
             <a:ext cx="7955279" cy="210312"/>
           </a:xfrm>
           <a:prstGeom prst="rect">
@@ -18029,7 +17991,7 @@
         </p:nvSpPr>
         <p:spPr>
           <a:xfrm>
-            <a:off x="594360" y="3831336"/>
+            <a:off x="594360" y="3810016"/>
             <a:ext cx="7955279" cy="685800"/>
           </a:xfrm>
           <a:prstGeom prst="rect">
@@ -18288,7 +18250,7 @@
         </p:nvSpPr>
         <p:spPr>
           <a:xfrm>
-            <a:off x="594360" y="1389888"/>
+            <a:off x="594360" y="1539798"/>
             <a:ext cx="7955279" cy="246888"/>
           </a:xfrm>
           <a:prstGeom prst="rect">
@@ -18342,7 +18304,7 @@
         </p:nvSpPr>
         <p:spPr>
           <a:xfrm>
-            <a:off x="548640" y="1761256"/>
+            <a:off x="548640" y="1868976"/>
             <a:ext cx="8046720" cy="2528517"/>
           </a:xfrm>
           <a:prstGeom prst="rect">
@@ -18386,7 +18348,7 @@
         </p:nvSpPr>
         <p:spPr>
           <a:xfrm>
-            <a:off x="722376" y="1847088"/>
+            <a:off x="722376" y="1954808"/>
             <a:ext cx="7699248" cy="2157984"/>
           </a:xfrm>
           <a:prstGeom prst="rect">
@@ -18645,7 +18607,7 @@
         </p:nvSpPr>
         <p:spPr>
           <a:xfrm>
-            <a:off x="594360" y="1389888"/>
+            <a:off x="594360" y="1416593"/>
             <a:ext cx="7955279" cy="210312"/>
           </a:xfrm>
           <a:prstGeom prst="rect">
@@ -18699,7 +18661,7 @@
         </p:nvSpPr>
         <p:spPr>
           <a:xfrm>
-            <a:off x="594360" y="1682496"/>
+            <a:off x="594360" y="1675602"/>
             <a:ext cx="7955279" cy="914400"/>
           </a:xfrm>
           <a:prstGeom prst="rect">
@@ -18753,7 +18715,7 @@
         </p:nvSpPr>
         <p:spPr>
           <a:xfrm>
-            <a:off x="594360" y="2560320"/>
+            <a:off x="594360" y="2464327"/>
             <a:ext cx="7955279" cy="210312"/>
           </a:xfrm>
           <a:prstGeom prst="rect">
@@ -18807,7 +18769,7 @@
         </p:nvSpPr>
         <p:spPr>
           <a:xfrm>
-            <a:off x="594360" y="2807208"/>
+            <a:off x="594360" y="2746108"/>
             <a:ext cx="7955279" cy="658368"/>
           </a:xfrm>
           <a:prstGeom prst="rect">
@@ -18861,7 +18823,7 @@
         </p:nvSpPr>
         <p:spPr>
           <a:xfrm>
-            <a:off x="594360" y="3621024"/>
+            <a:off x="594360" y="3533995"/>
             <a:ext cx="7955279" cy="210312"/>
           </a:xfrm>
           <a:prstGeom prst="rect">
@@ -18915,7 +18877,7 @@
         </p:nvSpPr>
         <p:spPr>
           <a:xfrm>
-            <a:off x="594360" y="3831336"/>
+            <a:off x="594360" y="3815560"/>
             <a:ext cx="7955279" cy="685800"/>
           </a:xfrm>
           <a:prstGeom prst="rect">
@@ -19174,7 +19136,7 @@
         </p:nvSpPr>
         <p:spPr>
           <a:xfrm>
-            <a:off x="594360" y="1389888"/>
+            <a:off x="594360" y="1684883"/>
             <a:ext cx="7955279" cy="246888"/>
           </a:xfrm>
           <a:prstGeom prst="rect">
@@ -19228,7 +19190,7 @@
         </p:nvSpPr>
         <p:spPr>
           <a:xfrm>
-            <a:off x="548640" y="1761256"/>
+            <a:off x="548640" y="2014061"/>
             <a:ext cx="8046720" cy="2238348"/>
           </a:xfrm>
           <a:prstGeom prst="rect">
@@ -19272,7 +19234,7 @@
         </p:nvSpPr>
         <p:spPr>
           <a:xfrm>
-            <a:off x="722376" y="1847088"/>
+            <a:off x="722376" y="2099893"/>
             <a:ext cx="7699248" cy="2157984"/>
           </a:xfrm>
           <a:prstGeom prst="rect">
@@ -19531,7 +19493,7 @@
         </p:nvSpPr>
         <p:spPr>
           <a:xfrm>
-            <a:off x="594360" y="1389888"/>
+            <a:off x="594360" y="1422136"/>
             <a:ext cx="7955279" cy="210312"/>
           </a:xfrm>
           <a:prstGeom prst="rect">
@@ -19585,7 +19547,7 @@
         </p:nvSpPr>
         <p:spPr>
           <a:xfrm>
-            <a:off x="594360" y="1682496"/>
+            <a:off x="594360" y="1731944"/>
             <a:ext cx="7955279" cy="914400"/>
           </a:xfrm>
           <a:prstGeom prst="rect">
@@ -19639,7 +19601,7 @@
         </p:nvSpPr>
         <p:spPr>
           <a:xfrm>
-            <a:off x="594360" y="2560320"/>
+            <a:off x="594360" y="2609570"/>
             <a:ext cx="7955279" cy="210312"/>
           </a:xfrm>
           <a:prstGeom prst="rect">
@@ -19693,7 +19655,7 @@
         </p:nvSpPr>
         <p:spPr>
           <a:xfrm>
-            <a:off x="594360" y="2807208"/>
+            <a:off x="594360" y="2942151"/>
             <a:ext cx="7955279" cy="658368"/>
           </a:xfrm>
           <a:prstGeom prst="rect">
@@ -19747,7 +19709,7 @@
         </p:nvSpPr>
         <p:spPr>
           <a:xfrm>
-            <a:off x="594360" y="3621024"/>
+            <a:off x="594360" y="3477651"/>
             <a:ext cx="7955279" cy="210312"/>
           </a:xfrm>
           <a:prstGeom prst="rect">
@@ -19801,7 +19763,7 @@
         </p:nvSpPr>
         <p:spPr>
           <a:xfrm>
-            <a:off x="594360" y="3831336"/>
+            <a:off x="594360" y="3810016"/>
             <a:ext cx="7955279" cy="685800"/>
           </a:xfrm>
           <a:prstGeom prst="rect">
@@ -20060,7 +20022,7 @@
         </p:nvSpPr>
         <p:spPr>
           <a:xfrm>
-            <a:off x="594360" y="1389888"/>
+            <a:off x="594360" y="2410662"/>
             <a:ext cx="7955279" cy="246888"/>
           </a:xfrm>
           <a:prstGeom prst="rect">
@@ -20114,7 +20076,7 @@
         </p:nvSpPr>
         <p:spPr>
           <a:xfrm>
-            <a:off x="548640" y="1761256"/>
+            <a:off x="548640" y="2739079"/>
             <a:ext cx="8046720" cy="787550"/>
           </a:xfrm>
           <a:prstGeom prst="rect">
@@ -20158,7 +20120,7 @@
         </p:nvSpPr>
         <p:spPr>
           <a:xfrm>
-            <a:off x="722376" y="1847088"/>
+            <a:off x="722376" y="2824910"/>
             <a:ext cx="7699248" cy="2157984"/>
           </a:xfrm>
           <a:prstGeom prst="rect">
@@ -20417,7 +20379,7 @@
         </p:nvSpPr>
         <p:spPr>
           <a:xfrm>
-            <a:off x="594360" y="1389888"/>
+            <a:off x="594360" y="1421495"/>
             <a:ext cx="7955279" cy="210312"/>
           </a:xfrm>
           <a:prstGeom prst="rect">
@@ -20471,7 +20433,7 @@
         </p:nvSpPr>
         <p:spPr>
           <a:xfrm>
-            <a:off x="594360" y="1682496"/>
+            <a:off x="594360" y="1731302"/>
             <a:ext cx="7955279" cy="914400"/>
           </a:xfrm>
           <a:prstGeom prst="rect">
@@ -20525,7 +20487,7 @@
         </p:nvSpPr>
         <p:spPr>
           <a:xfrm>
-            <a:off x="594360" y="2560320"/>
+            <a:off x="594360" y="2608928"/>
             <a:ext cx="7955279" cy="210312"/>
           </a:xfrm>
           <a:prstGeom prst="rect">
@@ -20579,7 +20541,7 @@
         </p:nvSpPr>
         <p:spPr>
           <a:xfrm>
-            <a:off x="594360" y="2807208"/>
+            <a:off x="594360" y="2941509"/>
             <a:ext cx="7955279" cy="658368"/>
           </a:xfrm>
           <a:prstGeom prst="rect">
@@ -20633,7 +20595,7 @@
         </p:nvSpPr>
         <p:spPr>
           <a:xfrm>
-            <a:off x="594360" y="3621024"/>
+            <a:off x="594360" y="3818295"/>
             <a:ext cx="7955279" cy="210312"/>
           </a:xfrm>
           <a:prstGeom prst="rect">
@@ -20687,7 +20649,7 @@
         </p:nvSpPr>
         <p:spPr>
           <a:xfrm>
-            <a:off x="594360" y="3831336"/>
+            <a:off x="594360" y="4150660"/>
             <a:ext cx="7955279" cy="685800"/>
           </a:xfrm>
           <a:prstGeom prst="rect">
@@ -20946,7 +20908,7 @@
         </p:nvSpPr>
         <p:spPr>
           <a:xfrm>
-            <a:off x="594360" y="1389888"/>
+            <a:off x="594360" y="1685264"/>
             <a:ext cx="7955279" cy="246888"/>
           </a:xfrm>
           <a:prstGeom prst="rect">
@@ -21000,7 +20962,7 @@
         </p:nvSpPr>
         <p:spPr>
           <a:xfrm>
-            <a:off x="548640" y="1761256"/>
+            <a:off x="548640" y="2013680"/>
             <a:ext cx="8046720" cy="2238348"/>
           </a:xfrm>
           <a:prstGeom prst="rect">
@@ -21044,7 +21006,7 @@
         </p:nvSpPr>
         <p:spPr>
           <a:xfrm>
-            <a:off x="722376" y="1847088"/>
+            <a:off x="722376" y="2099512"/>
             <a:ext cx="7699248" cy="2157984"/>
           </a:xfrm>
           <a:prstGeom prst="rect">
@@ -21417,7 +21379,7 @@
         </p:nvSpPr>
         <p:spPr>
           <a:xfrm>
-            <a:off x="594360" y="1389888"/>
+            <a:off x="594360" y="1421501"/>
             <a:ext cx="7955279" cy="210312"/>
           </a:xfrm>
           <a:prstGeom prst="rect">
@@ -21471,7 +21433,7 @@
         </p:nvSpPr>
         <p:spPr>
           <a:xfrm>
-            <a:off x="594360" y="1682496"/>
+            <a:off x="594360" y="1731309"/>
             <a:ext cx="7955279" cy="914400"/>
           </a:xfrm>
           <a:prstGeom prst="rect">
@@ -21525,7 +21487,7 @@
         </p:nvSpPr>
         <p:spPr>
           <a:xfrm>
-            <a:off x="594360" y="2560320"/>
+            <a:off x="594360" y="2608935"/>
             <a:ext cx="7955279" cy="210312"/>
           </a:xfrm>
           <a:prstGeom prst="rect">
@@ -21579,7 +21541,7 @@
         </p:nvSpPr>
         <p:spPr>
           <a:xfrm>
-            <a:off x="594360" y="2807208"/>
+            <a:off x="594360" y="2941516"/>
             <a:ext cx="7955279" cy="658368"/>
           </a:xfrm>
           <a:prstGeom prst="rect">
@@ -21633,7 +21595,7 @@
         </p:nvSpPr>
         <p:spPr>
           <a:xfrm>
-            <a:off x="594360" y="3621024"/>
+            <a:off x="594360" y="3477016"/>
             <a:ext cx="7955279" cy="210312"/>
           </a:xfrm>
           <a:prstGeom prst="rect">
@@ -21687,7 +21649,7 @@
         </p:nvSpPr>
         <p:spPr>
           <a:xfrm>
-            <a:off x="594360" y="3831336"/>
+            <a:off x="594360" y="3809381"/>
             <a:ext cx="7955279" cy="685800"/>
           </a:xfrm>
           <a:prstGeom prst="rect">
@@ -21946,7 +21908,7 @@
         </p:nvSpPr>
         <p:spPr>
           <a:xfrm>
-            <a:off x="594360" y="1389888"/>
+            <a:off x="594360" y="2410662"/>
             <a:ext cx="7955279" cy="246888"/>
           </a:xfrm>
           <a:prstGeom prst="rect">
@@ -22000,7 +21962,7 @@
         </p:nvSpPr>
         <p:spPr>
           <a:xfrm>
-            <a:off x="548640" y="1761256"/>
+            <a:off x="548640" y="2739079"/>
             <a:ext cx="8046720" cy="787550"/>
           </a:xfrm>
           <a:prstGeom prst="rect">
@@ -22044,7 +22006,7 @@
         </p:nvSpPr>
         <p:spPr>
           <a:xfrm>
-            <a:off x="722376" y="1847088"/>
+            <a:off x="722376" y="2824910"/>
             <a:ext cx="7699248" cy="2157984"/>
           </a:xfrm>
           <a:prstGeom prst="rect">
@@ -22303,7 +22265,7 @@
         </p:nvSpPr>
         <p:spPr>
           <a:xfrm>
-            <a:off x="594360" y="1389888"/>
+            <a:off x="594360" y="1421501"/>
             <a:ext cx="7955279" cy="210312"/>
           </a:xfrm>
           <a:prstGeom prst="rect">
@@ -22357,7 +22319,7 @@
         </p:nvSpPr>
         <p:spPr>
           <a:xfrm>
-            <a:off x="594360" y="1682496"/>
+            <a:off x="594360" y="1731309"/>
             <a:ext cx="7955279" cy="914400"/>
           </a:xfrm>
           <a:prstGeom prst="rect">
@@ -22411,7 +22373,7 @@
         </p:nvSpPr>
         <p:spPr>
           <a:xfrm>
-            <a:off x="594360" y="2560320"/>
+            <a:off x="594360" y="2608935"/>
             <a:ext cx="7955279" cy="210312"/>
           </a:xfrm>
           <a:prstGeom prst="rect">
@@ -22465,7 +22427,7 @@
         </p:nvSpPr>
         <p:spPr>
           <a:xfrm>
-            <a:off x="594360" y="2807208"/>
+            <a:off x="594360" y="2941516"/>
             <a:ext cx="7955279" cy="658368"/>
           </a:xfrm>
           <a:prstGeom prst="rect">
@@ -22519,7 +22481,7 @@
         </p:nvSpPr>
         <p:spPr>
           <a:xfrm>
-            <a:off x="594360" y="3621024"/>
+            <a:off x="594360" y="3478287"/>
             <a:ext cx="7955279" cy="210312"/>
           </a:xfrm>
           <a:prstGeom prst="rect">
@@ -22573,7 +22535,7 @@
         </p:nvSpPr>
         <p:spPr>
           <a:xfrm>
-            <a:off x="594360" y="3831336"/>
+            <a:off x="594360" y="3810652"/>
             <a:ext cx="7955279" cy="685800"/>
           </a:xfrm>
           <a:prstGeom prst="rect">
@@ -22832,7 +22794,7 @@
         </p:nvSpPr>
         <p:spPr>
           <a:xfrm>
-            <a:off x="594360" y="1389888"/>
+            <a:off x="594360" y="1684883"/>
             <a:ext cx="7955279" cy="246888"/>
           </a:xfrm>
           <a:prstGeom prst="rect">
@@ -22886,7 +22848,7 @@
         </p:nvSpPr>
         <p:spPr>
           <a:xfrm>
-            <a:off x="548640" y="1761256"/>
+            <a:off x="548640" y="2014061"/>
             <a:ext cx="8046720" cy="2238348"/>
           </a:xfrm>
           <a:prstGeom prst="rect">
@@ -22930,7 +22892,7 @@
         </p:nvSpPr>
         <p:spPr>
           <a:xfrm>
-            <a:off x="722376" y="1847088"/>
+            <a:off x="722376" y="2099893"/>
             <a:ext cx="7699248" cy="2157984"/>
           </a:xfrm>
           <a:prstGeom prst="rect">
@@ -23189,7 +23151,7 @@
         </p:nvSpPr>
         <p:spPr>
           <a:xfrm>
-            <a:off x="594360" y="1389888"/>
+            <a:off x="594360" y="1592138"/>
             <a:ext cx="7955279" cy="210312"/>
           </a:xfrm>
           <a:prstGeom prst="rect">
@@ -23243,7 +23205,7 @@
         </p:nvSpPr>
         <p:spPr>
           <a:xfrm>
-            <a:off x="594360" y="1682496"/>
+            <a:off x="594360" y="1901946"/>
             <a:ext cx="7955279" cy="914400"/>
           </a:xfrm>
           <a:prstGeom prst="rect">
@@ -23297,7 +23259,7 @@
         </p:nvSpPr>
         <p:spPr>
           <a:xfrm>
-            <a:off x="594360" y="2560320"/>
+            <a:off x="594360" y="2438298"/>
             <a:ext cx="7955279" cy="210312"/>
           </a:xfrm>
           <a:prstGeom prst="rect">
@@ -23351,7 +23313,7 @@
         </p:nvSpPr>
         <p:spPr>
           <a:xfrm>
-            <a:off x="594360" y="2807208"/>
+            <a:off x="594360" y="2770879"/>
             <a:ext cx="7955279" cy="658368"/>
           </a:xfrm>
           <a:prstGeom prst="rect">
@@ -23405,7 +23367,7 @@
         </p:nvSpPr>
         <p:spPr>
           <a:xfrm>
-            <a:off x="594360" y="3621024"/>
+            <a:off x="594360" y="3306379"/>
             <a:ext cx="7955279" cy="210312"/>
           </a:xfrm>
           <a:prstGeom prst="rect">
@@ -23459,7 +23421,7 @@
         </p:nvSpPr>
         <p:spPr>
           <a:xfrm>
-            <a:off x="594360" y="3831336"/>
+            <a:off x="594360" y="3638744"/>
             <a:ext cx="7955279" cy="685800"/>
           </a:xfrm>
           <a:prstGeom prst="rect">
@@ -23718,7 +23680,7 @@
         </p:nvSpPr>
         <p:spPr>
           <a:xfrm>
-            <a:off x="594360" y="1389888"/>
+            <a:off x="594360" y="1975421"/>
             <a:ext cx="7955279" cy="246888"/>
           </a:xfrm>
           <a:prstGeom prst="rect">
@@ -23772,7 +23734,7 @@
         </p:nvSpPr>
         <p:spPr>
           <a:xfrm>
-            <a:off x="548640" y="1761256"/>
+            <a:off x="548640" y="2303837"/>
             <a:ext cx="8046720" cy="1658034"/>
           </a:xfrm>
           <a:prstGeom prst="rect">
@@ -23816,7 +23778,7 @@
         </p:nvSpPr>
         <p:spPr>
           <a:xfrm>
-            <a:off x="722376" y="1847088"/>
+            <a:off x="722376" y="2389669"/>
             <a:ext cx="7699248" cy="2157984"/>
           </a:xfrm>
           <a:prstGeom prst="rect">
@@ -24075,7 +24037,7 @@
         </p:nvSpPr>
         <p:spPr>
           <a:xfrm>
-            <a:off x="594360" y="1389888"/>
+            <a:off x="594360" y="1421501"/>
             <a:ext cx="7955279" cy="210312"/>
           </a:xfrm>
           <a:prstGeom prst="rect">
@@ -24129,7 +24091,7 @@
         </p:nvSpPr>
         <p:spPr>
           <a:xfrm>
-            <a:off x="594360" y="1682496"/>
+            <a:off x="594360" y="1731309"/>
             <a:ext cx="7955279" cy="914400"/>
           </a:xfrm>
           <a:prstGeom prst="rect">
@@ -24183,7 +24145,7 @@
         </p:nvSpPr>
         <p:spPr>
           <a:xfrm>
-            <a:off x="594360" y="2560320"/>
+            <a:off x="594360" y="2608935"/>
             <a:ext cx="7955279" cy="210312"/>
           </a:xfrm>
           <a:prstGeom prst="rect">
@@ -24237,7 +24199,7 @@
         </p:nvSpPr>
         <p:spPr>
           <a:xfrm>
-            <a:off x="594360" y="2807208"/>
+            <a:off x="594360" y="2941516"/>
             <a:ext cx="7955279" cy="658368"/>
           </a:xfrm>
           <a:prstGeom prst="rect">
@@ -24291,7 +24253,7 @@
         </p:nvSpPr>
         <p:spPr>
           <a:xfrm>
-            <a:off x="594360" y="3621024"/>
+            <a:off x="594360" y="3478287"/>
             <a:ext cx="7955279" cy="210312"/>
           </a:xfrm>
           <a:prstGeom prst="rect">
@@ -24345,7 +24307,7 @@
         </p:nvSpPr>
         <p:spPr>
           <a:xfrm>
-            <a:off x="594360" y="3831336"/>
+            <a:off x="594360" y="3810652"/>
             <a:ext cx="7955279" cy="685800"/>
           </a:xfrm>
           <a:prstGeom prst="rect">
@@ -24604,7 +24566,7 @@
         </p:nvSpPr>
         <p:spPr>
           <a:xfrm>
-            <a:off x="594360" y="1389888"/>
+            <a:off x="594360" y="2265584"/>
             <a:ext cx="7955279" cy="246888"/>
           </a:xfrm>
           <a:prstGeom prst="rect">
@@ -24658,7 +24620,7 @@
         </p:nvSpPr>
         <p:spPr>
           <a:xfrm>
-            <a:off x="548640" y="1761256"/>
+            <a:off x="548640" y="2594000"/>
             <a:ext cx="8046720" cy="1077707"/>
           </a:xfrm>
           <a:prstGeom prst="rect">
@@ -24702,7 +24664,7 @@
         </p:nvSpPr>
         <p:spPr>
           <a:xfrm>
-            <a:off x="722376" y="1847088"/>
+            <a:off x="722376" y="2679832"/>
             <a:ext cx="7699248" cy="2157984"/>
           </a:xfrm>
           <a:prstGeom prst="rect">
@@ -24961,7 +24923,7 @@
         </p:nvSpPr>
         <p:spPr>
           <a:xfrm>
-            <a:off x="594360" y="1389888"/>
+            <a:off x="594360" y="1762140"/>
             <a:ext cx="7955279" cy="210312"/>
           </a:xfrm>
           <a:prstGeom prst="rect">
@@ -25015,7 +24977,7 @@
         </p:nvSpPr>
         <p:spPr>
           <a:xfrm>
-            <a:off x="594360" y="1682496"/>
+            <a:off x="594360" y="2071948"/>
             <a:ext cx="7955279" cy="914400"/>
           </a:xfrm>
           <a:prstGeom prst="rect">
@@ -25069,7 +25031,7 @@
         </p:nvSpPr>
         <p:spPr>
           <a:xfrm>
-            <a:off x="594360" y="2560320"/>
+            <a:off x="594360" y="2608299"/>
             <a:ext cx="7955279" cy="210312"/>
           </a:xfrm>
           <a:prstGeom prst="rect">
@@ -25123,7 +25085,7 @@
         </p:nvSpPr>
         <p:spPr>
           <a:xfrm>
-            <a:off x="594360" y="2807208"/>
+            <a:off x="594360" y="2940880"/>
             <a:ext cx="7955279" cy="658368"/>
           </a:xfrm>
           <a:prstGeom prst="rect">
@@ -25177,7 +25139,7 @@
         </p:nvSpPr>
         <p:spPr>
           <a:xfrm>
-            <a:off x="594360" y="3621024"/>
+            <a:off x="594360" y="3477651"/>
             <a:ext cx="7955279" cy="210312"/>
           </a:xfrm>
           <a:prstGeom prst="rect">
@@ -25231,7 +25193,7 @@
         </p:nvSpPr>
         <p:spPr>
           <a:xfrm>
-            <a:off x="594360" y="3831336"/>
+            <a:off x="594360" y="3810016"/>
             <a:ext cx="7955279" cy="685800"/>
           </a:xfrm>
           <a:prstGeom prst="rect">
@@ -25490,7 +25452,7 @@
         </p:nvSpPr>
         <p:spPr>
           <a:xfrm>
-            <a:off x="594360" y="1389888"/>
+            <a:off x="594360" y="2265584"/>
             <a:ext cx="7955279" cy="246888"/>
           </a:xfrm>
           <a:prstGeom prst="rect">
@@ -25544,7 +25506,7 @@
         </p:nvSpPr>
         <p:spPr>
           <a:xfrm>
-            <a:off x="548640" y="1761256"/>
+            <a:off x="548640" y="2594000"/>
             <a:ext cx="8046720" cy="1077707"/>
           </a:xfrm>
           <a:prstGeom prst="rect">
@@ -25588,7 +25550,7 @@
         </p:nvSpPr>
         <p:spPr>
           <a:xfrm>
-            <a:off x="722376" y="1847088"/>
+            <a:off x="722376" y="2679832"/>
             <a:ext cx="7699248" cy="2157984"/>
           </a:xfrm>
           <a:prstGeom prst="rect">
@@ -26165,7 +26127,7 @@
         </p:nvSpPr>
         <p:spPr>
           <a:xfrm>
-            <a:off x="594360" y="1389888"/>
+            <a:off x="594360" y="1592774"/>
             <a:ext cx="7955279" cy="210312"/>
           </a:xfrm>
           <a:prstGeom prst="rect">
@@ -26219,7 +26181,7 @@
         </p:nvSpPr>
         <p:spPr>
           <a:xfrm>
-            <a:off x="594360" y="1682496"/>
+            <a:off x="594360" y="1902581"/>
             <a:ext cx="7955279" cy="914400"/>
           </a:xfrm>
           <a:prstGeom prst="rect">
@@ -26273,7 +26235,7 @@
         </p:nvSpPr>
         <p:spPr>
           <a:xfrm>
-            <a:off x="594360" y="2560320"/>
+            <a:off x="594360" y="2438934"/>
             <a:ext cx="7955279" cy="210312"/>
           </a:xfrm>
           <a:prstGeom prst="rect">
@@ -26327,7 +26289,7 @@
         </p:nvSpPr>
         <p:spPr>
           <a:xfrm>
-            <a:off x="594360" y="2807208"/>
+            <a:off x="594360" y="2771515"/>
             <a:ext cx="7955279" cy="658368"/>
           </a:xfrm>
           <a:prstGeom prst="rect">
@@ -26381,7 +26343,7 @@
         </p:nvSpPr>
         <p:spPr>
           <a:xfrm>
-            <a:off x="594360" y="3621024"/>
+            <a:off x="594360" y="3307014"/>
             <a:ext cx="7955279" cy="210312"/>
           </a:xfrm>
           <a:prstGeom prst="rect">
@@ -26435,7 +26397,7 @@
         </p:nvSpPr>
         <p:spPr>
           <a:xfrm>
-            <a:off x="594360" y="3831336"/>
+            <a:off x="594360" y="3639379"/>
             <a:ext cx="7955279" cy="685800"/>
           </a:xfrm>
           <a:prstGeom prst="rect">
@@ -30866,7 +30828,7 @@
         </p:nvSpPr>
         <p:spPr>
           <a:xfrm>
-            <a:off x="594360" y="1389888"/>
+            <a:off x="594360" y="1540179"/>
             <a:ext cx="7955279" cy="246888"/>
           </a:xfrm>
           <a:prstGeom prst="rect">
@@ -30920,7 +30882,7 @@
         </p:nvSpPr>
         <p:spPr>
           <a:xfrm>
-            <a:off x="548640" y="1761256"/>
+            <a:off x="548640" y="1868595"/>
             <a:ext cx="8046720" cy="2528517"/>
           </a:xfrm>
           <a:prstGeom prst="rect">
@@ -30964,7 +30926,7 @@
         </p:nvSpPr>
         <p:spPr>
           <a:xfrm>
-            <a:off x="722376" y="1847088"/>
+            <a:off x="722376" y="1954427"/>
             <a:ext cx="7699248" cy="2157984"/>
           </a:xfrm>
           <a:prstGeom prst="rect">
@@ -31223,7 +31185,7 @@
         </p:nvSpPr>
         <p:spPr>
           <a:xfrm>
-            <a:off x="594360" y="1389888"/>
+            <a:off x="594360" y="1421501"/>
             <a:ext cx="7955279" cy="210312"/>
           </a:xfrm>
           <a:prstGeom prst="rect">
@@ -31277,7 +31239,7 @@
         </p:nvSpPr>
         <p:spPr>
           <a:xfrm>
-            <a:off x="594360" y="1682496"/>
+            <a:off x="594360" y="1731309"/>
             <a:ext cx="7955279" cy="914400"/>
           </a:xfrm>
           <a:prstGeom prst="rect">
@@ -31331,7 +31293,7 @@
         </p:nvSpPr>
         <p:spPr>
           <a:xfrm>
-            <a:off x="594360" y="2560320"/>
+            <a:off x="594360" y="2608935"/>
             <a:ext cx="7955279" cy="210312"/>
           </a:xfrm>
           <a:prstGeom prst="rect">
@@ -31385,7 +31347,7 @@
         </p:nvSpPr>
         <p:spPr>
           <a:xfrm>
-            <a:off x="594360" y="2807208"/>
+            <a:off x="594360" y="2941516"/>
             <a:ext cx="7955279" cy="658368"/>
           </a:xfrm>
           <a:prstGeom prst="rect">
@@ -31439,7 +31401,7 @@
         </p:nvSpPr>
         <p:spPr>
           <a:xfrm>
-            <a:off x="594360" y="3621024"/>
+            <a:off x="594360" y="3478287"/>
             <a:ext cx="7955279" cy="210312"/>
           </a:xfrm>
           <a:prstGeom prst="rect">
@@ -31493,7 +31455,7 @@
         </p:nvSpPr>
         <p:spPr>
           <a:xfrm>
-            <a:off x="594360" y="3831336"/>
+            <a:off x="594360" y="3810652"/>
             <a:ext cx="7955279" cy="685800"/>
           </a:xfrm>
           <a:prstGeom prst="rect">
@@ -31752,7 +31714,7 @@
         </p:nvSpPr>
         <p:spPr>
           <a:xfrm>
-            <a:off x="594360" y="1389888"/>
+            <a:off x="594360" y="2265584"/>
             <a:ext cx="7955279" cy="246888"/>
           </a:xfrm>
           <a:prstGeom prst="rect">
@@ -31806,7 +31768,7 @@
         </p:nvSpPr>
         <p:spPr>
           <a:xfrm>
-            <a:off x="548640" y="1761256"/>
+            <a:off x="548640" y="2594000"/>
             <a:ext cx="8046720" cy="1077707"/>
           </a:xfrm>
           <a:prstGeom prst="rect">
@@ -31850,7 +31812,7 @@
         </p:nvSpPr>
         <p:spPr>
           <a:xfrm>
-            <a:off x="722376" y="1847088"/>
+            <a:off x="722376" y="2679832"/>
             <a:ext cx="7699248" cy="2157984"/>
           </a:xfrm>
           <a:prstGeom prst="rect">

--- a/slides/datasets-in-10-minutes-facts-grounding.pptx
+++ b/slides/datasets-in-10-minutes-facts-grounding.pptx
@@ -9000,7 +9000,7 @@
                 <a:ea typeface="Noto Sans CJK JP"/>
                 <a:cs typeface="Noto Sans"/>
               </a:rPr>
-              <a:t>さらに、依頼へ十分に応えた回答かを判定する。依頼を満たさない回答は、根拠のある内容だけでも0点として集計する。</a:t>
+              <a:t>さらに、依頼へ十分に応えた回答かを判定する。依頼を満たさない回答は、根拠のある内容だけであっても0点として集計する。</a:t>
             </a:r>
           </a:p>
           <a:p>
@@ -11757,7 +11757,7 @@
                 <a:ea typeface="Noto Sans CJK JP"/>
                 <a:cs typeface="Noto Sans"/>
               </a:rPr>
-              <a:t>Groundingと、4課題の総合得点の関係</a:t>
+              <a:t>Groundingと4課題の総合得点の関係</a:t>
             </a:r>
           </a:p>
         </p:txBody>
@@ -12481,7 +12481,7 @@
         </p:nvGraphicFramePr>
         <p:xfrm>
           <a:off x="548640" y="1508760"/>
-          <a:ext cx="8046720" cy="2743200"/>
+          <a:ext cx="8046720" cy="3048000"/>
         </p:xfrm>
         <a:graphic>
           <a:graphicData uri="http://schemas.openxmlformats.org/drawingml/2006/table">
@@ -12946,7 +12946,7 @@
                           <a:ea typeface="Noto Sans CJK JP"/>
                           <a:cs typeface="Noto Sans"/>
                         </a:rPr>
-                        <a:t>全件を確認</a:t>
+                        <a:t>全件を確認する</a:t>
                       </a:r>
                     </a:p>
                   </a:txBody>
@@ -12996,7 +12996,7 @@
                           <a:ea typeface="Noto Sans CJK JP"/>
                           <a:cs typeface="Noto Sans"/>
                         </a:rPr>
-                        <a:t>指示との整合と文書の可読性を人が点検</a:t>
+                        <a:t>指示との整合性と文書の可読性を人が点検する</a:t>
                       </a:r>
                     </a:p>
                   </a:txBody>
@@ -13019,7 +13019,7 @@
                   </a:tcPr>
                 </a:tc>
               </a:tr>
-              <a:tr h="457200">
+              <a:tr h="762000">
                 <a:tc>
                   <a:txBody>
                     <a:bodyPr wrap="square">
@@ -13101,7 +13101,7 @@
                           <a:ea typeface="Noto Sans CJK JP"/>
                           <a:cs typeface="Noto Sans"/>
                         </a:rPr>
-                        <a:t>バランスを取った無作為抽出で公開・非公開へ</a:t>
+                        <a:t>バランスを取った無作為抽出で公開・非公開に分割する</a:t>
                       </a:r>
                     </a:p>
                   </a:txBody>
@@ -13336,7 +13336,7 @@
                 <a:ea typeface="Noto Sans CJK JP"/>
                 <a:cs typeface="Noto Sans"/>
               </a:rPr>
-              <a:t>作成者には、長い文書を処理し、長い回答を書く依頼を求めた。専門知識、複雑な推論、文体や著者意図の分析を必要とする依頼は避ける。</a:t>
+              <a:t>作成者には、長い文書を処理し、長い回答を書く依頼を求めた。専門知識、複雑な推論、文体や著者意図の分析を必要とする依頼は避けた。</a:t>
             </a:r>
           </a:p>
           <a:p>
@@ -14682,7 +14682,7 @@
                           <a:ea typeface="Noto Sans CJK JP"/>
                           <a:cs typeface="Noto Sans"/>
                         </a:rPr>
-                        <a:t>事実を探す</a:t>
+                        <a:t>事実の抽出</a:t>
                       </a:r>
                     </a:p>
                   </a:txBody>
@@ -14790,7 +14790,7 @@
                           <a:ea typeface="Noto Sans CJK JP"/>
                           <a:cs typeface="Noto Sans"/>
                         </a:rPr>
-                        <a:t>探して要約する</a:t>
+                        <a:t>抽出して要約する</a:t>
                       </a:r>
                     </a:p>
                   </a:txBody>
@@ -15498,7 +15498,7 @@
                 <a:ea typeface="Noto Sans CJK JP"/>
                 <a:cs typeface="Noto Sans"/>
               </a:rPr>
-              <a:t>2024年12月に、文書に基づく回答を扱うFACTS Groundingを公開。公開860問と非公開859問で評価を運営する。</a:t>
+              <a:t>2024年12月に、文書に基づく回答を扱うFACTS Groundingを公開。公開860問と非公開859問で評価を実施する。</a:t>
             </a:r>
           </a:p>
           <a:p>
@@ -16364,7 +16364,7 @@
                 <a:ea typeface="Noto Sans CJK JP"/>
                 <a:cs typeface="Noto Sans"/>
               </a:rPr>
-              <a:t>FACTS Groundingは、文書の情報を使い、依頼へ応える文章を生成する評価。質問応答だけでなく要約・比較・書き換えも含む。</a:t>
+              <a:t>FACTS Groundingは、文書の情報を使い、依頼に応える文章を生成する評価。質問応答だけでなく要約・比較・書き換えも含む。</a:t>
             </a:r>
           </a:p>
           <a:p>
@@ -16394,7 +16394,7 @@
                 <a:ea typeface="Noto Sans CJK JP"/>
                 <a:cs typeface="Noto Sans"/>
               </a:rPr>
-              <a:t>v2は入力問題を保ち、判定モデルと採点指示を更新した。事実性に加え、依頼へ十分に応えることを得点に反映する。</a:t>
+              <a:t>v2は入力問題を維持し、判定モデルと採点指示を更新した。事実性に加え、依頼に十分応えることを得点に反映する。</a:t>
             </a:r>
           </a:p>
           <a:p>
@@ -19734,7 +19734,7 @@
                 <a:ea typeface="Noto Sans CJK JP"/>
                 <a:cs typeface="Noto Sans"/>
               </a:rPr>
-              <a:t>ガンマ線望遠鏡と赤外線望遠鏡の違いを説明する。</a:t>
+              <a:t>ガンマ線望遠鏡と赤外線望遠鏡の違いを説明せよ。</a:t>
             </a:r>
           </a:p>
         </p:txBody>
@@ -19842,7 +19842,7 @@
                 <a:ea typeface="Noto Sans CJK JP"/>
                 <a:cs typeface="Noto Sans"/>
               </a:rPr>
-              <a:t>ガンマ線望遠鏡はレンズや鏡を使わず検出する。赤外線望遠鏡は、塵に包まれた天体の観測などに使う。</a:t>
+              <a:t>ガンマ線望遠鏡はレンズや鏡を使わずに検出する。赤外線望遠鏡は、塵に包まれた天体の観測などに使う。</a:t>
             </a:r>
           </a:p>
         </p:txBody>
@@ -20620,7 +20620,7 @@
                 <a:ea typeface="Noto Sans CJK JP"/>
                 <a:cs typeface="Noto Sans"/>
               </a:rPr>
-              <a:t>慢性C型肝炎ウイルス（HCV）感染者のうち、感染を自覚している人の世界全体での割合は。</a:t>
+              <a:t>慢性C型肝炎ウイルス（HCV）感染者のうち、感染を自覚している人の世界全体での割合は何％か。</a:t>
             </a:r>
           </a:p>
         </p:txBody>
@@ -21620,7 +21620,7 @@
                 <a:ea typeface="Noto Sans CJK JP"/>
                 <a:cs typeface="Noto Sans"/>
               </a:rPr>
-              <a:t>パンフレットに掲載されたディズニーのテーマパーク名を挙げる。</a:t>
+              <a:t>パンフレットに掲載されているディズニーのテーマパークの名前は何か。</a:t>
             </a:r>
           </a:p>
         </p:txBody>
@@ -22506,7 +22506,7 @@
                 <a:ea typeface="Noto Sans CJK JP"/>
                 <a:cs typeface="Noto Sans"/>
               </a:rPr>
-              <a:t>無線インターネット事業者（WISP）の接続に問題を起こす地形は。</a:t>
+              <a:t>無線インターネット事業者（WISP）の接続に問題を引き起こす地形は何か。</a:t>
             </a:r>
           </a:p>
         </p:txBody>
@@ -23392,7 +23392,7 @@
                 <a:ea typeface="Noto Sans CJK JP"/>
                 <a:cs typeface="Noto Sans"/>
               </a:rPr>
-              <a:t>利用できるファイアウォールと、その動作を説明する。</a:t>
+              <a:t>利用できるファイアウォールと、その動作を説明してください。</a:t>
             </a:r>
           </a:p>
         </p:txBody>
@@ -24278,7 +24278,7 @@
                 <a:ea typeface="Noto Sans CJK JP"/>
                 <a:cs typeface="Noto Sans"/>
               </a:rPr>
-              <a:t>FEMA経由と比べ、Wi-Fiや携帯網で地震速報を送る利点は。</a:t>
+              <a:t>FEMA経由と比べ、Wi-Fiや携帯網で地震速報を送る利点は何か。</a:t>
             </a:r>
           </a:p>
         </p:txBody>
@@ -25786,7 +25786,7 @@
                 <a:ea typeface="Noto Sans CJK JP"/>
                 <a:cs typeface="Noto Sans"/>
               </a:rPr>
-              <a:t>与えられた文書だけを根拠に、依頼へ答える</a:t>
+              <a:t>与えられた文書だけを根拠に、依頼に応える</a:t>
             </a:r>
           </a:p>
         </p:txBody>
@@ -25839,7 +25839,7 @@
                 <a:ea typeface="Noto Sans CJK JP"/>
                 <a:cs typeface="Noto Sans"/>
               </a:rPr>
-              <a:t>FACTS Groundingは、文書と依頼を読み、文書に基づく回答を生成する評価。質問応答、要約、比較、書き換えなどを扱う。</a:t>
+              <a:t>FACTS Groundingは、文書と依頼を読み、文書に基づく回答を生成する能力を評価する。質問応答、要約、比較、書き換えなどを扱う。</a:t>
             </a:r>
           </a:p>
           <a:p>
@@ -25899,7 +25899,7 @@
                 <a:ea typeface="Noto Sans CJK JP"/>
                 <a:cs typeface="Noto Sans"/>
               </a:rPr>
-              <a:t>採点では、回答が依頼に応えているかと、回答中の主張が文書に支えられているかを調べる。</a:t>
+              <a:t>採点では、回答が依頼に応えているかと、回答中の主張が文書に裏付けられているかを調べる。</a:t>
             </a:r>
           </a:p>
         </p:txBody>
@@ -27828,7 +27828,7 @@
                 <a:ea typeface="Noto Sans CJK JP"/>
                 <a:cs typeface="Noto Sans"/>
               </a:rPr>
-              <a:t>依頼の残りの種類と、構成比</a:t>
+              <a:t>依頼の残りの種類と構成比</a:t>
             </a:r>
           </a:p>
         </p:txBody>
@@ -28909,7 +28909,7 @@
                 <a:ea typeface="Noto Sans CJK JP"/>
                 <a:cs typeface="Noto Sans"/>
               </a:rPr>
-              <a:t>配布する入力と、バージョン別の評価資料</a:t>
+              <a:t>配布されている入力と、バージョン別の評価資料</a:t>
             </a:r>
           </a:p>
         </p:txBody>
@@ -28962,7 +28962,7 @@
                 <a:ea typeface="Noto Sans CJK JP"/>
                 <a:cs typeface="Noto Sans"/>
               </a:rPr>
-              <a:t>データはGoogleのHugging Face配布から、examples.csvを取得する。ライセンスはCC BY 4.0。転載した文書・依頼と訳には出典を付した。</a:t>
+              <a:t>データはGoogleのHugging Face配布から、examples.csvを取得した。ライセンスはCC BY 4.0。転載した文書・依頼と訳には出典を付した。</a:t>
             </a:r>
           </a:p>
           <a:p>
@@ -28992,7 +28992,7 @@
                 <a:ea typeface="Noto Sans CJK JP"/>
                 <a:cs typeface="Noto Sans"/>
               </a:rPr>
-              <a:t>同じ配布にあるevaluation_prompts.csvは、2024年の初期評価の採点指示。v2の判定モデル・指示の変更は、2025年のスイート論文で確認する。</a:t>
+              <a:t>同じ配布にあるevaluation_prompts.csvは、2024年の初期評価の採点指示。v2の判定モデル・指示の変更は、2025年のスイート論文で確認できる。</a:t>
             </a:r>
           </a:p>
           <a:p>
@@ -30126,7 +30126,7 @@
                 <a:ea typeface="Noto Sans CJK JP"/>
                 <a:cs typeface="Noto Sans"/>
               </a:rPr>
-              <a:t>人名や年を一つ答える評価に対し、この課題は複数の主張を含む回答を対象にする。文書の情報を選び、まとめて依頼へ応える。</a:t>
+              <a:t>人名や年を一つ答える評価に対し、この課題は複数の主張を含む回答を対象にする。文書の情報を選び、まとめて依頼に応える。</a:t>
             </a:r>
           </a:p>
           <a:p>

--- a/slides/datasets-in-10-minutes-facts-grounding.pptx
+++ b/slides/datasets-in-10-minutes-facts-grounding.pptx
@@ -13358,7 +13358,7 @@
                 <a:ea typeface="Noto Sans CJK JP"/>
                 <a:cs typeface="Noto Sans"/>
               </a:rPr>
-              <a:t>採用後の文書長は、原著によると平均約2.5Kトークン、最大32Kトークン。短い説明から長い報告書までを含む。</a:t>
+              <a:t>採用後の文書長は、平均約2.5Kトークン、最大32Kトークン。短い説明から長い報告書までを含む。</a:t>
             </a:r>
           </a:p>
         </p:txBody>
